--- a/Project_Submission/DebateIQ_Presentation.pptx
+++ b/Project_Submission/DebateIQ_Presentation.pptx
@@ -117,6 +117,58 @@
     </p:ext>
   </p:extLst>
 </p:presentation>
+</file>
+
+<file path=ppt/changesInfos/changesInfo1.xml><?xml version="1.0" encoding="utf-8"?>
+<pc:chgInfo xmlns:a="http://schemas.openxmlformats.org/drawingml/2006/main" xmlns:r="http://schemas.openxmlformats.org/officeDocument/2006/relationships" xmlns:ac="http://schemas.microsoft.com/office/drawing/2013/main/command" xmlns:pc="http://schemas.microsoft.com/office/powerpoint/2013/main/command">
+  <pc:docChgLst>
+    <pc:chgData name="Mohammad Zafar Adil" userId="7c8328480ec74855" providerId="LiveId" clId="{5C2C1E32-6879-4741-AFC3-306EC394E695}"/>
+    <pc:docChg chg="modSld">
+      <pc:chgData name="Mohammad Zafar Adil" userId="7c8328480ec74855" providerId="LiveId" clId="{5C2C1E32-6879-4741-AFC3-306EC394E695}" dt="2026-05-11T02:26:45.599" v="67" actId="20577"/>
+      <pc:docMkLst>
+        <pc:docMk/>
+      </pc:docMkLst>
+      <pc:sldChg chg="modSp mod">
+        <pc:chgData name="Mohammad Zafar Adil" userId="7c8328480ec74855" providerId="LiveId" clId="{5C2C1E32-6879-4741-AFC3-306EC394E695}" dt="2026-05-11T00:34:21.797" v="33" actId="20577"/>
+        <pc:sldMkLst>
+          <pc:docMk/>
+          <pc:sldMk cId="0" sldId="256"/>
+        </pc:sldMkLst>
+        <pc:spChg chg="mod">
+          <ac:chgData name="Mohammad Zafar Adil" userId="7c8328480ec74855" providerId="LiveId" clId="{5C2C1E32-6879-4741-AFC3-306EC394E695}" dt="2026-05-11T00:34:21.797" v="33" actId="20577"/>
+          <ac:spMkLst>
+            <pc:docMk/>
+            <pc:sldMk cId="0" sldId="256"/>
+            <ac:spMk id="5" creationId="{00000000-0000-0000-0000-000000000000}"/>
+          </ac:spMkLst>
+        </pc:spChg>
+      </pc:sldChg>
+      <pc:sldChg chg="modSp mod">
+        <pc:chgData name="Mohammad Zafar Adil" userId="7c8328480ec74855" providerId="LiveId" clId="{5C2C1E32-6879-4741-AFC3-306EC394E695}" dt="2026-05-11T02:26:45.599" v="67" actId="20577"/>
+        <pc:sldMkLst>
+          <pc:docMk/>
+          <pc:sldMk cId="0" sldId="259"/>
+        </pc:sldMkLst>
+        <pc:spChg chg="mod">
+          <ac:chgData name="Mohammad Zafar Adil" userId="7c8328480ec74855" providerId="LiveId" clId="{5C2C1E32-6879-4741-AFC3-306EC394E695}" dt="2026-05-11T02:26:45.599" v="67" actId="20577"/>
+          <ac:spMkLst>
+            <pc:docMk/>
+            <pc:sldMk cId="0" sldId="259"/>
+            <ac:spMk id="11" creationId="{00000000-0000-0000-0000-000000000000}"/>
+          </ac:spMkLst>
+        </pc:spChg>
+        <pc:spChg chg="mod">
+          <ac:chgData name="Mohammad Zafar Adil" userId="7c8328480ec74855" providerId="LiveId" clId="{5C2C1E32-6879-4741-AFC3-306EC394E695}" dt="2026-05-10T22:59:39.025" v="0" actId="14100"/>
+          <ac:spMkLst>
+            <pc:docMk/>
+            <pc:sldMk cId="0" sldId="259"/>
+            <ac:spMk id="18" creationId="{00000000-0000-0000-0000-000000000000}"/>
+          </ac:spMkLst>
+        </pc:spChg>
+      </pc:sldChg>
+    </pc:docChg>
+  </pc:docChgLst>
+</pc:chgInfo>
 </file>
 
 <file path=ppt/notesMasters/notesMaster1.xml><?xml version="1.0" encoding="utf-8"?>
@@ -1403,7 +1455,7 @@
                 <a:ea typeface="Arial" pitchFamily="34" charset="-122"/>
                 <a:cs typeface="Arial" pitchFamily="34" charset="-120"/>
               </a:rPr>
-              <a:t>[Your Name]  ·  AI Practitioner Course  ·  [Date]</a:t>
+              <a:t>[Zafar Adil]  ·  AI Practitioner Course  ·  [05/10/2026]</a:t>
             </a:r>
             <a:endParaRPr lang="en-US" sz="1400" dirty="0"/>
           </a:p>
@@ -2576,7 +2628,18 @@
                 <a:ea typeface="Arial" pitchFamily="34" charset="-122"/>
                 <a:cs typeface="Arial" pitchFamily="34" charset="-120"/>
               </a:rPr>
-              <a:t>Layer 3  →  Counter Argument     "What fights back?"</a:t>
+              <a:t>Layer 3  →  Counter Argument     "What </a:t>
+            </a:r>
+            <a:r>
+              <a:rPr lang="en-US" sz="1400" b="1">
+                <a:solidFill>
+                  <a:srgbClr val="FFFFFF"/>
+                </a:solidFill>
+                <a:latin typeface="Arial" pitchFamily="34" charset="0"/>
+                <a:ea typeface="Arial" pitchFamily="34" charset="-122"/>
+                <a:cs typeface="Arial" pitchFamily="34" charset="-120"/>
+              </a:rPr>
+              <a:t>Challenges that case"</a:t>
             </a:r>
             <a:endParaRPr lang="en-US" sz="1400" dirty="0"/>
           </a:p>
@@ -2794,8 +2857,8 @@
         </p:nvSpPr>
         <p:spPr>
           <a:xfrm>
-            <a:off x="457200" y="4389120"/>
-            <a:ext cx="8229600" cy="548640"/>
+            <a:off x="457200" y="4480560"/>
+            <a:ext cx="8229600" cy="457200"/>
           </a:xfrm>
           <a:prstGeom prst="rect">
             <a:avLst/>
